--- a/docs/presentation/Gladiators_Architecture.pptx
+++ b/docs/presentation/Gladiators_Architecture.pptx
@@ -799,7 +799,7 @@
             <c:idx val="3"/>
             <c:spPr>
               <a:solidFill>
-                <a:srgbClr val="C96F1E"/>
+                <a:srgbClr val="2F7A4F"/>
               </a:solidFill>
             </c:spPr>
           </c:dPt>
@@ -807,7 +807,7 @@
             <c:idx val="4"/>
             <c:spPr>
               <a:solidFill>
-                <a:srgbClr val="C96F1E"/>
+                <a:srgbClr val="2F7A4F"/>
               </a:solidFill>
             </c:spPr>
           </c:dPt>
@@ -815,48 +815,60 @@
             <c:idx val="5"/>
             <c:spPr>
               <a:solidFill>
-                <a:srgbClr val="A6333F"/>
+                <a:srgbClr val="2F7A4F"/>
+              </a:solidFill>
+            </c:spPr>
+          </c:dPt>
+          <c:dPt>
+            <c:idx val="6"/>
+            <c:spPr>
+              <a:solidFill>
+                <a:srgbClr val="2F7A4F"/>
               </a:solidFill>
             </c:spPr>
           </c:dPt>
           <c:cat>
             <c:strRef>
-              <c:f>Sheet1!$A$2:$A$7</c:f>
+              <c:f>Sheet1!$A$2:$A$8</c:f>
               <c:strCache>
-                <c:ptCount val="6"/>
+                <c:ptCount val="7"/>
                 <c:pt idx="0">
+                  <c:v>legacy questions
+60×3</c:v>
+                </c:pt>
+                <c:pt idx="1">
+                  <c:v>V2
+11×3</c:v>
+                </c:pt>
+                <c:pt idx="2">
+                  <c:v>A19
+6×3</c:v>
+                </c:pt>
+                <c:pt idx="3">
                   <c:v>boundaries
 9×3</c:v>
                 </c:pt>
-                <c:pt idx="1">
-                  <c:v>Phase 6
-external 12/12</c:v>
-                </c:pt>
-                <c:pt idx="2">
-                  <c:v>eval report
-09/08 4×3</c:v>
-                </c:pt>
-                <c:pt idx="3">
-                  <c:v>V2
-11×3</c:v>
-                </c:pt>
                 <c:pt idx="4">
-                  <c:v>A19
-6×3</c:v>
+                  <c:v>ambiguity
+4×3</c:v>
                 </c:pt>
                 <c:pt idx="5">
-                  <c:v>legacy questions
-60×3</c:v>
+                  <c:v>critic
+4×3</c:v>
+                </c:pt>
+                <c:pt idx="6">
+                  <c:v>counting
+3×3</c:v>
                 </c:pt>
               </c:strCache>
             </c:strRef>
           </c:cat>
           <c:val>
             <c:numRef>
-              <c:f>Sheet1!$B$2:$B$7</c:f>
+              <c:f>Sheet1!$B$2:$B$8</c:f>
               <c:numCache>
                 <c:formatCode>General</c:formatCode>
-                <c:ptCount val="6"/>
+                <c:ptCount val="7"/>
                 <c:pt idx="0">
                   <c:v>1.0</c:v>
                 </c:pt>
@@ -867,13 +879,16 @@
                   <c:v>1.0</c:v>
                 </c:pt>
                 <c:pt idx="3">
-                  <c:v>0.879</c:v>
+                  <c:v>1.0</c:v>
                 </c:pt>
                 <c:pt idx="4">
-                  <c:v>0.833</c:v>
+                  <c:v>1.0</c:v>
                 </c:pt>
                 <c:pt idx="5">
-                  <c:v>0.65</c:v>
+                  <c:v>1.0</c:v>
+                </c:pt>
+                <c:pt idx="6">
+                  <c:v>1.0</c:v>
                 </c:pt>
               </c:numCache>
             </c:numRef>
@@ -12482,7 +12497,7 @@
                 </a:solidFill>
                 <a:latin typeface="Segoe UI"/>
               </a:rPr>
-              <a:t>Đánh giá độc lập 20 câu — và bốn lớp lỗi đã khắc phục</a:t>
+              <a:t>Đánh giá độc lập 20 câu — và sáu lớp lỗi đã khắc phục</a:t>
             </a:r>
           </a:p>
         </p:txBody>
@@ -13236,7 +13251,7 @@
                           </a:solidFill>
                           <a:latin typeface="Segoe UI"/>
                         </a:rPr>
-                        <a:t>spec, chưa hiện thực</a:t>
+                        <a:t>✔ đã hiện thực</a:t>
                       </a:r>
                     </a:p>
                   </a:txBody>
@@ -13307,7 +13322,7 @@
                           </a:solidFill>
                           <a:latin typeface="Segoe UI"/>
                         </a:rPr>
-                        <a:t>spec, chưa hiện thực</a:t>
+                        <a:t>✔ đã hiện thực</a:t>
                       </a:r>
                     </a:p>
                   </a:txBody>
@@ -13378,7 +13393,7 @@
                           </a:solidFill>
                           <a:latin typeface="Segoe UI"/>
                         </a:rPr>
-                        <a:t>spec, chưa hiện thực</a:t>
+                        <a:t>✔ trace; precedence giữ nguyên</a:t>
                       </a:r>
                     </a:p>
                   </a:txBody>
@@ -13427,7 +13442,7 @@
                 </a:solidFill>
                 <a:latin typeface="Segoe UI"/>
               </a:rPr>
-              <a:t>Xác minh lại 09/08:</a:t>
+              <a:t>Xác minh lại 10/08:</a:t>
             </a:r>
           </a:p>
           <a:p>
@@ -13443,7 +13458,7 @@
                 </a:solidFill>
                 <a:latin typeface="Segoe UI"/>
               </a:rPr>
-              <a:t>bgk01 → shop_count=10 ✔  ·  bgk02/11 crash → clarify có rule_id ✔  ·  bgk03 → 577/91 khớp oracle ✔  ·  bgk13 → clarify coverage ✔</a:t>
+              <a:t>bgk01 → shop_count=10 ✔ · bgk02/11 crash → clarify có rule_id ✔ · bgk03 → 577/91 khớp oracle ✔ · bgk13 → clarify coverage ✔ · bgk16 → A-ENTITY-NOT-FOUND ✔ · bgk14 → A-MISSING-PROFIT ✔</a:t>
             </a:r>
           </a:p>
         </p:txBody>
@@ -13588,7 +13603,7 @@
                 </a:solidFill>
                 <a:latin typeface="Segoe UI"/>
               </a:rPr>
-              <a:t>Trạng thái đo — sáu suite, và một regression được nói thẳng</a:t>
+              <a:t>Trạng thái đo — bảy suite, đo lại sau vòng sửa sáu lớp lỗi</a:t>
             </a:r>
           </a:p>
         </p:txBody>
@@ -13627,7 +13642,7 @@
                 </a:solidFill>
                 <a:latin typeface="Segoe UI"/>
               </a:rPr>
-              <a:t>CHART 4/4 · Đo tại HEAD nhánh MVP_Dai_V2, provider=offline</a:t>
+              <a:t>CHART 4/4 · Đo tại HEAD nhánh MVP_Dai_V2 (1cf7327), provider=offline, --runs 3</a:t>
             </a:r>
           </a:p>
         </p:txBody>
@@ -13787,7 +13802,7 @@
             <a:avLst/>
           </a:prstGeom>
           <a:solidFill>
-            <a:srgbClr val="FDF4F5"/>
+            <a:srgbClr val="FFFBF0"/>
           </a:solidFill>
           <a:ln>
             <a:noFill/>
@@ -13831,7 +13846,7 @@
             <a:avLst/>
           </a:prstGeom>
           <a:solidFill>
-            <a:srgbClr val="A6333F"/>
+            <a:srgbClr val="C96F1E"/>
           </a:solidFill>
           <a:ln>
             <a:noFill/>
@@ -13890,11 +13905,11 @@
             <a:r>
               <a:rPr sz="1100" b="1" i="0">
                 <a:solidFill>
-                  <a:srgbClr val="A6333F"/>
-                </a:solidFill>
-                <a:latin typeface="Segoe UI"/>
-              </a:rPr>
-              <a:t>Cả 21 case fail của suite legacy có CHUNG một nguyên nhân — và đó là false positive của verifier</a:t>
+                  <a:srgbClr val="C96F1E"/>
+                </a:solidFill>
+                <a:latin typeface="Segoe UI"/>
+              </a:rPr>
+              <a:t>Regression legacy 0.65 ghi trong CLAUDE.md §5 KHÔNG còn tái lập — và không phải do vòng sửa này</a:t>
             </a:r>
           </a:p>
           <a:p>
@@ -13910,7 +13925,7 @@
                 </a:solidFill>
                 <a:latin typeface="Segoe UI"/>
               </a:rPr>
-              <a:t>Message A-AMBIGUOUS echo tên listing ứng viên; tên chứa chữ số (“… Cream 30 Gr”) → verifier.scan_numbers đọc “30” thành một claim không có evidence → passed=False. Câu trả lời KHÔNG sai; phép kiểm đang quá nhạy. Regression có sẵn ở origin/MVP_Dai_V2 (645d558), không do commit local.</a:t>
+              <a:t>Đo lại chính suite đó ở commit gốc TRƯỚC vòng sửa (31c1d6b, dựng worktree riêng) cũng cho 1.0. Con số 0.65/0.879/0.833 trong CLAUDE.md §5 đo ngày 08/08 tại 1df8e5b và đã cũ; nguyên nhân nó biến mất chưa được truy, nên deck KHÔNG nhận công. Điều kiểm được là trạng thái hiện tại, đo bằng lệnh in ở phụ đề.</a:t>
             </a:r>
           </a:p>
         </p:txBody>
